--- a/dist/초2/수학/수와계산/초2_수학_수와계산_10_7단과9단_학생용.pptx
+++ b/dist/초2/수학/수와계산/초2_수학_수와계산_10_7단과9단_학생용.pptx
@@ -121,13 +121,13 @@
   <p:extLst>
     <p:ext uri="{521415D9-36F7-43E2-AB2F-B90AF26B5E84}">
       <p14:sectionLst xmlns:p14="http://schemas.microsoft.com/office/powerpoint/2010/main">
-        <p14:section name="도입" id="{c153d2af-eef0-2375-0f78-9c4a85e2226e}">
+        <p14:section name="도입" id="{441d8856-dc1d-a19b-ccaa-696d97a32510}">
           <p14:sldIdLst>
             <p14:sldId id="256"/>
             <p14:sldId id="257"/>
           </p14:sldIdLst>
         </p14:section>
-        <p14:section name="개념" id="{8198231c-5c2e-268b-cf12-1b4edfd842de}">
+        <p14:section name="개념" id="{d62cb9f1-6099-8a24-40d9-1a11236a1e31}">
           <p14:sldIdLst>
             <p14:sldId id="258"/>
             <p14:sldId id="259"/>
@@ -137,25 +137,25 @@
             <p14:sldId id="263"/>
           </p14:sldIdLst>
         </p14:section>
-        <p14:section name="연습" id="{80d3874d-9c80-5538-d241-f611b642ac7c}">
+        <p14:section name="연습" id="{eace58ae-172d-bee7-6909-3c35f608e9af}">
           <p14:sldIdLst>
             <p14:sldId id="264"/>
             <p14:sldId id="265"/>
             <p14:sldId id="266"/>
           </p14:sldIdLst>
         </p14:section>
-        <p14:section name="확인" id="{af391990-c338-075c-d7b0-d8c0acbd3abf}">
+        <p14:section name="확인" id="{24093209-c1dd-2ed8-26c0-e8121cc3be24}">
           <p14:sldIdLst>
             <p14:sldId id="267"/>
             <p14:sldId id="268"/>
           </p14:sldIdLst>
         </p14:section>
-        <p14:section name="정리" id="{df936958-890e-8622-6ce6-8e15179ed769}">
+        <p14:section name="정리" id="{c3d66d60-e38c-26d8-d56d-c83b4e07016c}">
           <p14:sldIdLst>
             <p14:sldId id="269"/>
           </p14:sldIdLst>
         </p14:section>
-        <p14:section name="보충" id="{4c3545f6-a889-f5e3-21e2-2aff1c17f17c}">
+        <p14:section name="보충" id="{28b1d2ae-126a-cdd1-3a9d-5a0563bb6e26}">
           <p14:sldIdLst>
             <p14:sldId id="270"/>
           </p14:sldIdLst>

--- a/dist/초2/수학/수와계산/초2_수학_수와계산_10_7단과9단_학생용.pptx
+++ b/dist/초2/수학/수와계산/초2_수학_수와계산_10_7단과9단_학생용.pptx
@@ -121,13 +121,13 @@
   <p:extLst>
     <p:ext uri="{521415D9-36F7-43E2-AB2F-B90AF26B5E84}">
       <p14:sectionLst xmlns:p14="http://schemas.microsoft.com/office/powerpoint/2010/main">
-        <p14:section name="도입" id="{441d8856-dc1d-a19b-ccaa-696d97a32510}">
+        <p14:section name="도입" id="{6af61f52-09fb-33f3-7dbb-70e3ec1075a4}">
           <p14:sldIdLst>
             <p14:sldId id="256"/>
             <p14:sldId id="257"/>
           </p14:sldIdLst>
         </p14:section>
-        <p14:section name="개념" id="{d62cb9f1-6099-8a24-40d9-1a11236a1e31}">
+        <p14:section name="개념" id="{d90f0758-5f18-0d30-4dff-040f35a3cfb5}">
           <p14:sldIdLst>
             <p14:sldId id="258"/>
             <p14:sldId id="259"/>
@@ -137,25 +137,25 @@
             <p14:sldId id="263"/>
           </p14:sldIdLst>
         </p14:section>
-        <p14:section name="연습" id="{eace58ae-172d-bee7-6909-3c35f608e9af}">
+        <p14:section name="연습" id="{b077b46f-c94c-1754-261d-041047ad1e24}">
           <p14:sldIdLst>
             <p14:sldId id="264"/>
             <p14:sldId id="265"/>
             <p14:sldId id="266"/>
           </p14:sldIdLst>
         </p14:section>
-        <p14:section name="확인" id="{24093209-c1dd-2ed8-26c0-e8121cc3be24}">
+        <p14:section name="확인" id="{be73ad15-2803-c66d-fd7a-36e724cadfcf}">
           <p14:sldIdLst>
             <p14:sldId id="267"/>
             <p14:sldId id="268"/>
           </p14:sldIdLst>
         </p14:section>
-        <p14:section name="정리" id="{c3d66d60-e38c-26d8-d56d-c83b4e07016c}">
+        <p14:section name="정리" id="{e3da5708-43f3-f76f-810e-627b899cc4a9}">
           <p14:sldIdLst>
             <p14:sldId id="269"/>
           </p14:sldIdLst>
         </p14:section>
-        <p14:section name="보충" id="{28b1d2ae-126a-cdd1-3a9d-5a0563bb6e26}">
+        <p14:section name="보충" id="{2a75e58b-3a12-6323-3fcb-83d9d27caf87}">
           <p14:sldIdLst>
             <p14:sldId id="270"/>
           </p14:sldIdLst>
@@ -12747,7 +12747,7 @@
           </p:nvPr>
         </p:nvGraphicFramePr>
         <p:xfrm>
-          <a:off x="548640" y="2509520"/>
+          <a:off x="548640" y="2542540"/>
           <a:ext cx="11091672" cy="914400"/>
         </p:xfrm>
         <a:graphic>
@@ -12766,7 +12766,7 @@
                 <a:gridCol w="1109167"/>
                 <a:gridCol w="1109167"/>
               </a:tblGrid>
-              <a:tr h="528320">
+              <a:tr h="511810">
                 <a:tc>
                   <a:txBody>
                     <a:bodyPr/>
@@ -13448,7 +13448,7 @@
                   </a:tcPr>
                 </a:tc>
               </a:tr>
-              <a:tr h="528320">
+              <a:tr h="511810">
                 <a:tc>
                   <a:txBody>
                     <a:bodyPr/>
@@ -14130,7 +14130,7 @@
                   </a:tcPr>
                 </a:tc>
               </a:tr>
-              <a:tr h="528320">
+              <a:tr h="511810">
                 <a:tc>
                   <a:txBody>
                     <a:bodyPr/>
@@ -14812,7 +14812,7 @@
                   </a:tcPr>
                 </a:tc>
               </a:tr>
-              <a:tr h="528320">
+              <a:tr h="511810">
                 <a:tc>
                   <a:txBody>
                     <a:bodyPr/>
@@ -18994,7 +18994,7 @@
           </p:nvPr>
         </p:nvGraphicFramePr>
         <p:xfrm>
-          <a:off x="548640" y="3037840"/>
+          <a:off x="548640" y="3054350"/>
           <a:ext cx="11091672" cy="914400"/>
         </p:xfrm>
         <a:graphic>
@@ -19012,7 +19012,7 @@
                 <a:gridCol w="1232408"/>
                 <a:gridCol w="1232408"/>
               </a:tblGrid>
-              <a:tr h="528320">
+              <a:tr h="511810">
                 <a:tc>
                   <a:txBody>
                     <a:bodyPr/>
@@ -19626,7 +19626,7 @@
                   </a:tcPr>
                 </a:tc>
               </a:tr>
-              <a:tr h="528320">
+              <a:tr h="511810">
                 <a:tc>
                   <a:txBody>
                     <a:bodyPr/>
